--- a/就職作品詳細アピール.pptx
+++ b/就職作品詳細アピール.pptx
@@ -193,7 +193,7 @@
           <a:p>
             <a:fld id="{1D8BD707-D9CF-40AE-B4C6-C98DA3205C09}" type="datetimeFigureOut">
               <a:rPr lang="en-US"/>
-              <a:t>1/13/2026</a:t>
+              <a:t>1/28/2026</a:t>
             </a:fld>
             <a:endParaRPr lang="en-US"/>
           </a:p>
@@ -370,7 +370,7 @@
           <a:p>
             <a:fld id="{1D8BD707-D9CF-40AE-B4C6-C98DA3205C09}" type="datetimeFigureOut">
               <a:rPr lang="en-US"/>
-              <a:t>1/13/2026</a:t>
+              <a:t>1/28/2026</a:t>
             </a:fld>
             <a:endParaRPr lang="en-US"/>
           </a:p>
@@ -584,7 +584,7 @@
           <a:p>
             <a:fld id="{1D8BD707-D9CF-40AE-B4C6-C98DA3205C09}" type="datetimeFigureOut">
               <a:rPr lang="en-US"/>
-              <a:t>1/13/2026</a:t>
+              <a:t>1/28/2026</a:t>
             </a:fld>
             <a:endParaRPr lang="en-US"/>
           </a:p>
@@ -732,7 +732,7 @@
           <a:p>
             <a:fld id="{1D8BD707-D9CF-40AE-B4C6-C98DA3205C09}" type="datetimeFigureOut">
               <a:rPr lang="en-US"/>
-              <a:t>1/13/2026</a:t>
+              <a:t>1/28/2026</a:t>
             </a:fld>
             <a:endParaRPr lang="en-US"/>
           </a:p>
@@ -851,7 +851,7 @@
           <a:p>
             <a:fld id="{1D8BD707-D9CF-40AE-B4C6-C98DA3205C09}" type="datetimeFigureOut">
               <a:rPr lang="en-US"/>
-              <a:t>1/13/2026</a:t>
+              <a:t>1/28/2026</a:t>
             </a:fld>
             <a:endParaRPr lang="en-US"/>
           </a:p>
@@ -1098,7 +1098,7 @@
           <a:p>
             <a:fld id="{1D8BD707-D9CF-40AE-B4C6-C98DA3205C09}" type="datetimeFigureOut">
               <a:rPr lang="en-US"/>
-              <a:t>1/13/2026</a:t>
+              <a:t>1/28/2026</a:t>
             </a:fld>
             <a:endParaRPr lang="en-US"/>
           </a:p>
